--- a/Week_5/Typescript.pptx
+++ b/Week_5/Typescript.pptx
@@ -15,6 +15,7 @@
     <p:sldId id="321" r:id="rId9"/>
     <p:sldId id="323" r:id="rId10"/>
     <p:sldId id="324" r:id="rId11"/>
+    <p:sldId id="326" r:id="rId12"/>
   </p:sldIdLst>
   <p:sldSz cx="12192000" cy="6858000"/>
   <p:notesSz cx="6858000" cy="9144000"/>
@@ -381,7 +382,7 @@
             <a:fld id="{B61BEF0D-F0BB-DE4B-95CE-6DB70DBA9567}" type="datetimeFigureOut">
               <a:rPr lang="en-US" dirty="0"/>
               <a:pPr/>
-              <a:t>9/21/2026</a:t>
+              <a:t>9/23/2026</a:t>
             </a:fld>
             <a:endParaRPr lang="en-US" dirty="0"/>
           </a:p>
@@ -643,7 +644,7 @@
             <a:fld id="{B61BEF0D-F0BB-DE4B-95CE-6DB70DBA9567}" type="datetimeFigureOut">
               <a:rPr lang="en-US" dirty="0"/>
               <a:pPr/>
-              <a:t>9/21/2026</a:t>
+              <a:t>9/23/2026</a:t>
             </a:fld>
             <a:endParaRPr lang="en-US" dirty="0"/>
           </a:p>
@@ -878,7 +879,7 @@
             <a:fld id="{B61BEF0D-F0BB-DE4B-95CE-6DB70DBA9567}" type="datetimeFigureOut">
               <a:rPr lang="en-US" dirty="0"/>
               <a:pPr/>
-              <a:t>9/21/2026</a:t>
+              <a:t>9/23/2026</a:t>
             </a:fld>
             <a:endParaRPr lang="en-US" dirty="0"/>
           </a:p>
@@ -1125,7 +1126,7 @@
             <a:fld id="{B61BEF0D-F0BB-DE4B-95CE-6DB70DBA9567}" type="datetimeFigureOut">
               <a:rPr lang="en-US" dirty="0"/>
               <a:pPr/>
-              <a:t>9/21/2026</a:t>
+              <a:t>9/23/2026</a:t>
             </a:fld>
             <a:endParaRPr lang="en-US" dirty="0"/>
           </a:p>
@@ -1433,7 +1434,7 @@
             <a:fld id="{B61BEF0D-F0BB-DE4B-95CE-6DB70DBA9567}" type="datetimeFigureOut">
               <a:rPr lang="en-US" dirty="0"/>
               <a:pPr/>
-              <a:t>9/21/2026</a:t>
+              <a:t>9/23/2026</a:t>
             </a:fld>
             <a:endParaRPr lang="en-US" dirty="0"/>
           </a:p>
@@ -1734,7 +1735,7 @@
             <a:fld id="{B61BEF0D-F0BB-DE4B-95CE-6DB70DBA9567}" type="datetimeFigureOut">
               <a:rPr lang="en-US" dirty="0"/>
               <a:pPr/>
-              <a:t>9/21/2026</a:t>
+              <a:t>9/23/2026</a:t>
             </a:fld>
             <a:endParaRPr lang="en-US" dirty="0"/>
           </a:p>
@@ -2155,7 +2156,7 @@
             <a:fld id="{B61BEF0D-F0BB-DE4B-95CE-6DB70DBA9567}" type="datetimeFigureOut">
               <a:rPr lang="en-US" dirty="0"/>
               <a:pPr/>
-              <a:t>9/21/2026</a:t>
+              <a:t>9/23/2026</a:t>
             </a:fld>
             <a:endParaRPr lang="en-US" dirty="0"/>
           </a:p>
@@ -2318,7 +2319,7 @@
             <a:fld id="{B61BEF0D-F0BB-DE4B-95CE-6DB70DBA9567}" type="datetimeFigureOut">
               <a:rPr lang="en-US" dirty="0"/>
               <a:pPr/>
-              <a:t>9/21/2026</a:t>
+              <a:t>9/23/2026</a:t>
             </a:fld>
             <a:endParaRPr lang="en-US" dirty="0"/>
           </a:p>
@@ -2415,7 +2416,7 @@
             <a:fld id="{B61BEF0D-F0BB-DE4B-95CE-6DB70DBA9567}" type="datetimeFigureOut">
               <a:rPr lang="en-US" dirty="0"/>
               <a:pPr/>
-              <a:t>9/21/2026</a:t>
+              <a:t>9/23/2026</a:t>
             </a:fld>
             <a:endParaRPr lang="en-US" dirty="0"/>
           </a:p>
@@ -2793,7 +2794,7 @@
             <a:fld id="{B61BEF0D-F0BB-DE4B-95CE-6DB70DBA9567}" type="datetimeFigureOut">
               <a:rPr lang="en-US" dirty="0"/>
               <a:pPr/>
-              <a:t>9/21/2026</a:t>
+              <a:t>9/23/2026</a:t>
             </a:fld>
             <a:endParaRPr lang="en-US" dirty="0"/>
           </a:p>
@@ -3079,7 +3080,7 @@
             <a:fld id="{B61BEF0D-F0BB-DE4B-95CE-6DB70DBA9567}" type="datetimeFigureOut">
               <a:rPr lang="en-US" dirty="0"/>
               <a:pPr/>
-              <a:t>9/21/2026</a:t>
+              <a:t>9/23/2026</a:t>
             </a:fld>
             <a:endParaRPr lang="en-US" dirty="0"/>
           </a:p>
@@ -3318,7 +3319,7 @@
             <a:fld id="{B61BEF0D-F0BB-DE4B-95CE-6DB70DBA9567}" type="datetimeFigureOut">
               <a:rPr lang="en-US" dirty="0"/>
               <a:pPr/>
-              <a:t>9/21/2026</a:t>
+              <a:t>9/23/2026</a:t>
             </a:fld>
             <a:endParaRPr lang="en-US" dirty="0"/>
           </a:p>
@@ -4149,6 +4150,422 @@
 </p:sld>
 </file>
 
+<file path=ppt/slides/slide11.xml><?xml version="1.0" encoding="utf-8"?>
+<p:sld xmlns:a="http://schemas.openxmlformats.org/drawingml/2006/main" xmlns:r="http://schemas.openxmlformats.org/officeDocument/2006/relationships" xmlns:p="http://schemas.openxmlformats.org/presentationml/2006/main">
+  <p:cSld>
+    <p:spTree>
+      <p:nvGrpSpPr>
+        <p:cNvPr id="1" name=""/>
+        <p:cNvGrpSpPr/>
+        <p:nvPr/>
+      </p:nvGrpSpPr>
+      <p:grpSpPr>
+        <a:xfrm>
+          <a:off x="0" y="0"/>
+          <a:ext cx="0" cy="0"/>
+          <a:chOff x="0" y="0"/>
+          <a:chExt cx="0" cy="0"/>
+        </a:xfrm>
+      </p:grpSpPr>
+      <p:sp>
+        <p:nvSpPr>
+          <p:cNvPr id="2" name="Title 1">
+            <a:extLst>
+              <a:ext uri="{FF2B5EF4-FFF2-40B4-BE49-F238E27FC236}">
+                <a16:creationId xmlns:a16="http://schemas.microsoft.com/office/drawing/2014/main" id="{CE6C0862-DE5F-BA95-BCFB-11DE1C6D8653}"/>
+              </a:ext>
+            </a:extLst>
+          </p:cNvPr>
+          <p:cNvSpPr>
+            <a:spLocks noGrp="1"/>
+          </p:cNvSpPr>
+          <p:nvPr>
+            <p:ph type="title"/>
+          </p:nvPr>
+        </p:nvSpPr>
+        <p:spPr/>
+        <p:txBody>
+          <a:bodyPr/>
+          <a:lstStyle/>
+          <a:p>
+            <a:r>
+              <a:rPr lang="en-US" dirty="0"/>
+              <a:t>Special Types</a:t>
+            </a:r>
+          </a:p>
+        </p:txBody>
+      </p:sp>
+      <p:sp>
+        <p:nvSpPr>
+          <p:cNvPr id="3" name="Content Placeholder 2">
+            <a:extLst>
+              <a:ext uri="{FF2B5EF4-FFF2-40B4-BE49-F238E27FC236}">
+                <a16:creationId xmlns:a16="http://schemas.microsoft.com/office/drawing/2014/main" id="{04D0D071-059A-4C77-D1F7-72E3DBFC4914}"/>
+              </a:ext>
+            </a:extLst>
+          </p:cNvPr>
+          <p:cNvSpPr>
+            <a:spLocks noGrp="1"/>
+          </p:cNvSpPr>
+          <p:nvPr>
+            <p:ph idx="1"/>
+          </p:nvPr>
+        </p:nvSpPr>
+        <p:spPr>
+          <a:xfrm>
+            <a:off x="581192" y="2180497"/>
+            <a:ext cx="11029615" cy="796620"/>
+          </a:xfrm>
+        </p:spPr>
+        <p:txBody>
+          <a:bodyPr/>
+          <a:lstStyle/>
+          <a:p>
+            <a:r>
+              <a:rPr lang="en-US" dirty="0"/>
+              <a:t>We should really avoid ‘any’</a:t>
+            </a:r>
+          </a:p>
+        </p:txBody>
+      </p:sp>
+      <p:pic>
+        <p:nvPicPr>
+          <p:cNvPr id="5" name="Picture 4">
+            <a:extLst>
+              <a:ext uri="{FF2B5EF4-FFF2-40B4-BE49-F238E27FC236}">
+                <a16:creationId xmlns:a16="http://schemas.microsoft.com/office/drawing/2014/main" id="{8055957C-CFB5-5696-357C-3907FD033696}"/>
+              </a:ext>
+            </a:extLst>
+          </p:cNvPr>
+          <p:cNvPicPr>
+            <a:picLocks noChangeAspect="1"/>
+          </p:cNvPicPr>
+          <p:nvPr/>
+        </p:nvPicPr>
+        <p:blipFill>
+          <a:blip r:embed="rId2"/>
+          <a:stretch>
+            <a:fillRect/>
+          </a:stretch>
+        </p:blipFill>
+        <p:spPr>
+          <a:xfrm>
+            <a:off x="3495311" y="2844210"/>
+            <a:ext cx="5201376" cy="866896"/>
+          </a:xfrm>
+          <a:prstGeom prst="rect">
+            <a:avLst/>
+          </a:prstGeom>
+        </p:spPr>
+      </p:pic>
+      <p:pic>
+        <p:nvPicPr>
+          <p:cNvPr id="7" name="Picture 6">
+            <a:extLst>
+              <a:ext uri="{FF2B5EF4-FFF2-40B4-BE49-F238E27FC236}">
+                <a16:creationId xmlns:a16="http://schemas.microsoft.com/office/drawing/2014/main" id="{555A83B0-30D1-E9DE-2AD5-3F91078DA746}"/>
+              </a:ext>
+            </a:extLst>
+          </p:cNvPr>
+          <p:cNvPicPr>
+            <a:picLocks noChangeAspect="1"/>
+          </p:cNvPicPr>
+          <p:nvPr/>
+        </p:nvPicPr>
+        <p:blipFill>
+          <a:blip r:embed="rId3"/>
+          <a:stretch>
+            <a:fillRect/>
+          </a:stretch>
+        </p:blipFill>
+        <p:spPr>
+          <a:xfrm>
+            <a:off x="990714" y="4836994"/>
+            <a:ext cx="4408004" cy="1559954"/>
+          </a:xfrm>
+          <a:prstGeom prst="rect">
+            <a:avLst/>
+          </a:prstGeom>
+        </p:spPr>
+      </p:pic>
+      <p:pic>
+        <p:nvPicPr>
+          <p:cNvPr id="9" name="Picture 8">
+            <a:extLst>
+              <a:ext uri="{FF2B5EF4-FFF2-40B4-BE49-F238E27FC236}">
+                <a16:creationId xmlns:a16="http://schemas.microsoft.com/office/drawing/2014/main" id="{13B63DD7-1C97-7F0A-CAB6-25B5EB3CA9A1}"/>
+              </a:ext>
+            </a:extLst>
+          </p:cNvPr>
+          <p:cNvPicPr>
+            <a:picLocks noChangeAspect="1"/>
+          </p:cNvPicPr>
+          <p:nvPr/>
+        </p:nvPicPr>
+        <p:blipFill>
+          <a:blip r:embed="rId4"/>
+          <a:stretch>
+            <a:fillRect/>
+          </a:stretch>
+        </p:blipFill>
+        <p:spPr>
+          <a:xfrm>
+            <a:off x="6793284" y="4836994"/>
+            <a:ext cx="3504113" cy="1587921"/>
+          </a:xfrm>
+          <a:prstGeom prst="rect">
+            <a:avLst/>
+          </a:prstGeom>
+        </p:spPr>
+      </p:pic>
+      <p:sp>
+        <p:nvSpPr>
+          <p:cNvPr id="10" name="Content Placeholder 2">
+            <a:extLst>
+              <a:ext uri="{FF2B5EF4-FFF2-40B4-BE49-F238E27FC236}">
+                <a16:creationId xmlns:a16="http://schemas.microsoft.com/office/drawing/2014/main" id="{2BE4C481-AFD8-602E-DC08-A36BA0B46FA0}"/>
+              </a:ext>
+            </a:extLst>
+          </p:cNvPr>
+          <p:cNvSpPr txBox="1">
+            <a:spLocks/>
+          </p:cNvSpPr>
+          <p:nvPr/>
+        </p:nvSpPr>
+        <p:spPr>
+          <a:xfrm>
+            <a:off x="581191" y="3711106"/>
+            <a:ext cx="11029615" cy="796620"/>
+          </a:xfrm>
+          <a:prstGeom prst="rect">
+            <a:avLst/>
+          </a:prstGeom>
+        </p:spPr>
+        <p:txBody>
+          <a:bodyPr vert="horz" lIns="91440" tIns="45720" rIns="91440" bIns="45720" rtlCol="0" anchor="ctr">
+            <a:normAutofit/>
+          </a:bodyPr>
+          <a:lstStyle>
+            <a:lvl1pPr marL="306000" indent="-306000" algn="l" defTabSz="457200" rtl="0" eaLnBrk="1" latinLnBrk="0" hangingPunct="1">
+              <a:spcBef>
+                <a:spcPct val="20000"/>
+              </a:spcBef>
+              <a:spcAft>
+                <a:spcPts val="600"/>
+              </a:spcAft>
+              <a:buClr>
+                <a:schemeClr val="accent2"/>
+              </a:buClr>
+              <a:buSzPct val="92000"/>
+              <a:buFont typeface="Wingdings 2" panose="05020102010507070707" pitchFamily="18" charset="2"/>
+              <a:buChar char=""/>
+              <a:defRPr sz="1800" kern="1200">
+                <a:solidFill>
+                  <a:schemeClr val="tx2"/>
+                </a:solidFill>
+                <a:latin typeface="+mn-lt"/>
+                <a:ea typeface="+mn-ea"/>
+                <a:cs typeface="+mn-cs"/>
+              </a:defRPr>
+            </a:lvl1pPr>
+            <a:lvl2pPr marL="630000" indent="-306000" algn="l" defTabSz="457200" rtl="0" eaLnBrk="1" latinLnBrk="0" hangingPunct="1">
+              <a:spcBef>
+                <a:spcPct val="20000"/>
+              </a:spcBef>
+              <a:spcAft>
+                <a:spcPts val="600"/>
+              </a:spcAft>
+              <a:buClr>
+                <a:schemeClr val="accent2"/>
+              </a:buClr>
+              <a:buSzPct val="92000"/>
+              <a:buFont typeface="Wingdings 2" panose="05020102010507070707" pitchFamily="18" charset="2"/>
+              <a:buChar char=""/>
+              <a:defRPr sz="1600" kern="1200">
+                <a:solidFill>
+                  <a:schemeClr val="tx2"/>
+                </a:solidFill>
+                <a:latin typeface="+mn-lt"/>
+                <a:ea typeface="+mn-ea"/>
+                <a:cs typeface="+mn-cs"/>
+              </a:defRPr>
+            </a:lvl2pPr>
+            <a:lvl3pPr marL="900000" indent="-270000" algn="l" defTabSz="457200" rtl="0" eaLnBrk="1" latinLnBrk="0" hangingPunct="1">
+              <a:spcBef>
+                <a:spcPct val="20000"/>
+              </a:spcBef>
+              <a:spcAft>
+                <a:spcPts val="600"/>
+              </a:spcAft>
+              <a:buClr>
+                <a:schemeClr val="accent2"/>
+              </a:buClr>
+              <a:buSzPct val="92000"/>
+              <a:buFont typeface="Wingdings 2" panose="05020102010507070707" pitchFamily="18" charset="2"/>
+              <a:buChar char=""/>
+              <a:defRPr sz="1400" kern="1200">
+                <a:solidFill>
+                  <a:schemeClr val="tx2"/>
+                </a:solidFill>
+                <a:latin typeface="+mn-lt"/>
+                <a:ea typeface="+mn-ea"/>
+                <a:cs typeface="+mn-cs"/>
+              </a:defRPr>
+            </a:lvl3pPr>
+            <a:lvl4pPr marL="1242000" indent="-234000" algn="l" defTabSz="457200" rtl="0" eaLnBrk="1" latinLnBrk="0" hangingPunct="1">
+              <a:spcBef>
+                <a:spcPct val="20000"/>
+              </a:spcBef>
+              <a:spcAft>
+                <a:spcPts val="600"/>
+              </a:spcAft>
+              <a:buClr>
+                <a:schemeClr val="accent2"/>
+              </a:buClr>
+              <a:buSzPct val="92000"/>
+              <a:buFont typeface="Wingdings 2" panose="05020102010507070707" pitchFamily="18" charset="2"/>
+              <a:buChar char=""/>
+              <a:defRPr sz="1200" kern="1200">
+                <a:solidFill>
+                  <a:schemeClr val="tx2"/>
+                </a:solidFill>
+                <a:latin typeface="+mn-lt"/>
+                <a:ea typeface="+mn-ea"/>
+                <a:cs typeface="+mn-cs"/>
+              </a:defRPr>
+            </a:lvl4pPr>
+            <a:lvl5pPr marL="1602000" indent="-234000" algn="l" defTabSz="457200" rtl="0" eaLnBrk="1" latinLnBrk="0" hangingPunct="1">
+              <a:spcBef>
+                <a:spcPct val="20000"/>
+              </a:spcBef>
+              <a:spcAft>
+                <a:spcPts val="600"/>
+              </a:spcAft>
+              <a:buClr>
+                <a:schemeClr val="accent2"/>
+              </a:buClr>
+              <a:buSzPct val="92000"/>
+              <a:buFont typeface="Wingdings 2" panose="05020102010507070707" pitchFamily="18" charset="2"/>
+              <a:buChar char=""/>
+              <a:defRPr sz="1200" kern="1200">
+                <a:solidFill>
+                  <a:schemeClr val="tx2"/>
+                </a:solidFill>
+                <a:latin typeface="+mn-lt"/>
+                <a:ea typeface="+mn-ea"/>
+                <a:cs typeface="+mn-cs"/>
+              </a:defRPr>
+            </a:lvl5pPr>
+            <a:lvl6pPr marL="1900000" indent="-228600" algn="l" defTabSz="457200" rtl="0" eaLnBrk="1" latinLnBrk="0" hangingPunct="1">
+              <a:spcBef>
+                <a:spcPct val="20000"/>
+              </a:spcBef>
+              <a:spcAft>
+                <a:spcPts val="600"/>
+              </a:spcAft>
+              <a:buClr>
+                <a:schemeClr val="accent2"/>
+              </a:buClr>
+              <a:buSzPct val="92000"/>
+              <a:buFont typeface="Wingdings 2" panose="05020102010507070707" pitchFamily="18" charset="2"/>
+              <a:buChar char=""/>
+              <a:defRPr sz="1200" kern="1200">
+                <a:solidFill>
+                  <a:schemeClr val="tx2"/>
+                </a:solidFill>
+                <a:latin typeface="+mn-lt"/>
+                <a:ea typeface="+mn-ea"/>
+                <a:cs typeface="+mn-cs"/>
+              </a:defRPr>
+            </a:lvl6pPr>
+            <a:lvl7pPr marL="2200000" indent="-228600" algn="l" defTabSz="457200" rtl="0" eaLnBrk="1" latinLnBrk="0" hangingPunct="1">
+              <a:spcBef>
+                <a:spcPct val="20000"/>
+              </a:spcBef>
+              <a:spcAft>
+                <a:spcPts val="600"/>
+              </a:spcAft>
+              <a:buClr>
+                <a:schemeClr val="accent2"/>
+              </a:buClr>
+              <a:buSzPct val="92000"/>
+              <a:buFont typeface="Wingdings 2" panose="05020102010507070707" pitchFamily="18" charset="2"/>
+              <a:buChar char=""/>
+              <a:defRPr sz="1200" kern="1200">
+                <a:solidFill>
+                  <a:schemeClr val="tx2"/>
+                </a:solidFill>
+                <a:latin typeface="+mn-lt"/>
+                <a:ea typeface="+mn-ea"/>
+                <a:cs typeface="+mn-cs"/>
+              </a:defRPr>
+            </a:lvl7pPr>
+            <a:lvl8pPr marL="2500000" indent="-228600" algn="l" defTabSz="457200" rtl="0" eaLnBrk="1" latinLnBrk="0" hangingPunct="1">
+              <a:spcBef>
+                <a:spcPct val="20000"/>
+              </a:spcBef>
+              <a:spcAft>
+                <a:spcPts val="600"/>
+              </a:spcAft>
+              <a:buClr>
+                <a:schemeClr val="accent2"/>
+              </a:buClr>
+              <a:buSzPct val="92000"/>
+              <a:buFont typeface="Wingdings 2" panose="05020102010507070707" pitchFamily="18" charset="2"/>
+              <a:buChar char=""/>
+              <a:defRPr sz="1200" kern="1200">
+                <a:solidFill>
+                  <a:schemeClr val="tx2"/>
+                </a:solidFill>
+                <a:latin typeface="+mn-lt"/>
+                <a:ea typeface="+mn-ea"/>
+                <a:cs typeface="+mn-cs"/>
+              </a:defRPr>
+            </a:lvl8pPr>
+            <a:lvl9pPr marL="2800000" indent="-228600" algn="l" defTabSz="457200" rtl="0" eaLnBrk="1" latinLnBrk="0" hangingPunct="1">
+              <a:spcBef>
+                <a:spcPct val="20000"/>
+              </a:spcBef>
+              <a:spcAft>
+                <a:spcPts val="600"/>
+              </a:spcAft>
+              <a:buClr>
+                <a:schemeClr val="accent2"/>
+              </a:buClr>
+              <a:buSzPct val="92000"/>
+              <a:buFont typeface="Wingdings 2" panose="05020102010507070707" pitchFamily="18" charset="2"/>
+              <a:buChar char=""/>
+              <a:defRPr sz="1200" kern="1200">
+                <a:solidFill>
+                  <a:schemeClr val="tx2"/>
+                </a:solidFill>
+                <a:latin typeface="+mn-lt"/>
+                <a:ea typeface="+mn-ea"/>
+                <a:cs typeface="+mn-cs"/>
+              </a:defRPr>
+            </a:lvl9pPr>
+          </a:lstStyle>
+          <a:p>
+            <a:r>
+              <a:rPr lang="en-US" dirty="0"/>
+              <a:t>‘Unknown’ is a bit better. It behaves like any, but we must still cast it before using it</a:t>
+            </a:r>
+          </a:p>
+        </p:txBody>
+      </p:sp>
+    </p:spTree>
+    <p:extLst>
+      <p:ext uri="{BB962C8B-B14F-4D97-AF65-F5344CB8AC3E}">
+        <p14:creationId xmlns:p14="http://schemas.microsoft.com/office/powerpoint/2010/main" val="3635971430"/>
+      </p:ext>
+    </p:extLst>
+  </p:cSld>
+  <p:clrMapOvr>
+    <a:masterClrMapping/>
+  </p:clrMapOvr>
+</p:sld>
+</file>
+
 <file path=ppt/slides/slide2.xml><?xml version="1.0" encoding="utf-8"?>
 <p:sld xmlns:a="http://schemas.openxmlformats.org/drawingml/2006/main" xmlns:r="http://schemas.openxmlformats.org/officeDocument/2006/relationships" xmlns:p="http://schemas.openxmlformats.org/presentationml/2006/main">
   <p:cSld>
@@ -4363,7 +4780,15 @@
           <a:p>
             <a:r>
               <a:rPr lang="en-US" dirty="0"/>
-              <a:t>Typescript – Intro Commands</a:t>
+              <a:t>Typescript – Intro Commands &amp; </a:t>
+            </a:r>
+            <a:r>
+              <a:rPr lang="en-US" dirty="0" err="1"/>
+              <a:t>tsconfig</a:t>
+            </a:r>
+            <a:r>
+              <a:rPr lang="en-US" dirty="0"/>
+              <a:t> intro</a:t>
             </a:r>
           </a:p>
         </p:txBody>
@@ -4386,7 +4811,7 @@
         </p:nvSpPr>
         <p:spPr>
           <a:xfrm>
-            <a:off x="2900446" y="2193196"/>
+            <a:off x="1347219" y="2180670"/>
             <a:ext cx="6391108" cy="3678303"/>
           </a:xfrm>
         </p:spPr>
@@ -4416,7 +4841,7 @@
           <a:p>
             <a:r>
               <a:rPr lang="en-US" dirty="0"/>
-              <a:t>compile a file:</a:t>
+              <a:t>compile files:</a:t>
             </a:r>
           </a:p>
           <a:p>
@@ -4447,12 +4872,47 @@
             </a:r>
           </a:p>
           <a:p>
+            <a:pPr lvl="1"/>
             <a:r>
               <a:rPr lang="en-US" dirty="0" err="1"/>
               <a:t>tsc</a:t>
             </a:r>
             <a:r>
               <a:rPr lang="en-US" dirty="0"/>
+              <a:t> --build </a:t>
+            </a:r>
+            <a:r>
+              <a:rPr lang="en-US" dirty="0" err="1"/>
+              <a:t>src</a:t>
+            </a:r>
+            <a:r>
+              <a:rPr lang="en-US" dirty="0"/>
+              <a:t> (to build included files in </a:t>
+            </a:r>
+            <a:r>
+              <a:rPr lang="en-US" dirty="0" err="1"/>
+              <a:t>src</a:t>
+            </a:r>
+            <a:r>
+              <a:rPr lang="en-US" dirty="0"/>
+              <a:t> via </a:t>
+            </a:r>
+            <a:r>
+              <a:rPr lang="en-US" dirty="0" err="1"/>
+              <a:t>tsconfig</a:t>
+            </a:r>
+            <a:r>
+              <a:rPr lang="en-US" dirty="0"/>
+              <a:t>)</a:t>
+            </a:r>
+          </a:p>
+          <a:p>
+            <a:r>
+              <a:rPr lang="en-US" dirty="0" err="1"/>
+              <a:t>tsc</a:t>
+            </a:r>
+            <a:r>
+              <a:rPr lang="en-US" dirty="0"/>
               <a:t> --</a:t>
             </a:r>
             <a:r>
@@ -4472,11 +4932,38 @@
               <a:t> file (compiler settings)</a:t>
             </a:r>
           </a:p>
-          <a:p>
-            <a:endParaRPr lang="en-US" dirty="0"/>
-          </a:p>
-        </p:txBody>
-      </p:sp>
+        </p:txBody>
+      </p:sp>
+      <p:pic>
+        <p:nvPicPr>
+          <p:cNvPr id="7" name="Picture 6">
+            <a:extLst>
+              <a:ext uri="{FF2B5EF4-FFF2-40B4-BE49-F238E27FC236}">
+                <a16:creationId xmlns:a16="http://schemas.microsoft.com/office/drawing/2014/main" id="{FD646E2B-7E68-173A-F188-7B664AF1994E}"/>
+              </a:ext>
+            </a:extLst>
+          </p:cNvPr>
+          <p:cNvPicPr>
+            <a:picLocks noChangeAspect="1"/>
+          </p:cNvPicPr>
+          <p:nvPr/>
+        </p:nvPicPr>
+        <p:blipFill>
+          <a:blip r:embed="rId2"/>
+          <a:stretch>
+            <a:fillRect/>
+          </a:stretch>
+        </p:blipFill>
+        <p:spPr>
+          <a:xfrm>
+            <a:off x="7805882" y="3262478"/>
+            <a:ext cx="3038899" cy="1514686"/>
+          </a:xfrm>
+          <a:prstGeom prst="rect">
+            <a:avLst/>
+          </a:prstGeom>
+        </p:spPr>
+      </p:pic>
     </p:spTree>
     <p:extLst>
       <p:ext uri="{BB962C8B-B14F-4D97-AF65-F5344CB8AC3E}">
@@ -4732,11 +5219,13 @@
         <p:spPr>
           <a:xfrm>
             <a:off x="606594" y="2387965"/>
-            <a:ext cx="3768558" cy="3678303"/>
-          </a:xfrm>
-        </p:spPr>
-        <p:txBody>
-          <a:bodyPr/>
+            <a:ext cx="3768558" cy="4037650"/>
+          </a:xfrm>
+        </p:spPr>
+        <p:txBody>
+          <a:bodyPr>
+            <a:normAutofit fontScale="92500" lnSpcReduction="10000"/>
+          </a:bodyPr>
           <a:lstStyle/>
           <a:p>
             <a:r>
@@ -4760,6 +5249,20 @@
             <a:r>
               <a:rPr lang="en-US" dirty="0"/>
               <a:t>We can mark a field as nullable with ‘?’ when defining interfaces</a:t>
+            </a:r>
+          </a:p>
+          <a:p>
+            <a:r>
+              <a:rPr lang="en-US" dirty="0"/>
+              <a:t>The </a:t>
+            </a:r>
+            <a:r>
+              <a:rPr lang="en-US" dirty="0" err="1"/>
+              <a:t>readonly</a:t>
+            </a:r>
+            <a:r>
+              <a:rPr lang="en-US" dirty="0"/>
+              <a:t> keyword may be used to mark properties as constants</a:t>
             </a:r>
           </a:p>
           <a:p>
